--- a/10-plantas/01-steelmaking/05-capacitacion/MM-EAF-02/MM-EAF-02_Capacitacion_AMMX.pptx
+++ b/10-plantas/01-steelmaking/05-capacitacion/MM-EAF-02/MM-EAF-02_Capacitacion_AMMX.pptx
@@ -3673,7 +3673,7 @@
                 <a:ea typeface="Century Gothic" pitchFamily="34" charset="-122"/>
                 <a:cs typeface="Century Gothic" pitchFamily="34" charset="-120"/>
               </a:rPr>
-              <a:t>Para: S-19 Mecánico · S-22 Técnico Hidráulico · S-20 Electricista · S-21 Instrumentista · S-04 Grúa de Carga · C-11</a:t>
+              <a:t>Para: S-19 Mecánico · S-22 Técnico Hidráulico · S-20 Electricista · S-21 Instrumentista · S-04 Grúa de Carga · S-01 Primer Hornero · C-11</a:t>
             </a:r>
             <a:endParaRPr lang="en-US" sz="1100" dirty="0"/>
           </a:p>
@@ -20033,7 +20033,7 @@
                 <a:ea typeface="Calibri" pitchFamily="34" charset="-122"/>
                 <a:cs typeface="Calibri" pitchFamily="34" charset="-120"/>
               </a:rPr>
-              <a:t>Siguiente paso: OJT supervisado y evaluación práctica (TD-P07); registro en IMaS y DC-3/SIRCE. Validación: pendiente.</a:t>
+              <a:t>Siguiente paso: OJT supervisado y evaluación práctica (TD-P07); registro en IMaS y DC-3/SIRCE. Validación: visto bueno técnica, seguridad, laboral, diseño instruccional.</a:t>
             </a:r>
             <a:endParaRPr lang="en-US" sz="750" dirty="0"/>
           </a:p>
@@ -25405,7 +25405,7 @@
                 <a:ea typeface="Century Gothic" pitchFamily="34" charset="-122"/>
                 <a:cs typeface="Century Gothic" pitchFamily="34" charset="-120"/>
               </a:rPr>
-              <a:t>Diez componentes; el aislamiento ≥ 1 MΩ manda</a:t>
+              <a:t>En los componentes, el aislamiento ≥ 1 MΩ manda</a:t>
             </a:r>
             <a:endParaRPr lang="en-US" sz="2400" dirty="0"/>
           </a:p>
@@ -31827,7 +31827,7 @@
                 <a:ea typeface="Century Gothic" pitchFamily="34" charset="-122"/>
                 <a:cs typeface="Century Gothic" pitchFamily="34" charset="-120"/>
               </a:rPr>
-              <a:t>Arnés y línea de vida (NOM-009); bóveda ≤ 60 °C o EPP térmico; al cortar o soldar, 0 % LEL detectable.</a:t>
+              <a:t>Arnés y línea de vida (NOM-009); bóveda ≤ 60 °C o EPP térmico; cortar o soldar solo con 0 % LEL detectable (≤ 1 % de lectura).</a:t>
             </a:r>
             <a:endParaRPr lang="en-US" sz="1100" dirty="0"/>
           </a:p>
